--- a/@Materi Kuliah/Materi_Analisis_Multivariat_Tingkat_Lanjut/Presentasi_Analisis_Multivariat_Tingkat_Lanjut_Profesional_dari_HTML.pptx
+++ b/@Materi Kuliah/Materi_Analisis_Multivariat_Tingkat_Lanjut/Presentasi_Analisis_Multivariat_Tingkat_Lanjut_Profesional_dari_HTML.pptx
@@ -2,131 +2,36 @@
 <file path=ppt/presentation.xml><?xml version="1.0" encoding="utf-8"?>
 <p:presentation xmlns:p="http://schemas.openxmlformats.org/presentationml/2006/main">
   <p:sldMasterIdLst>
-    <p:sldMasterId xmlns:r="http://schemas.openxmlformats.org/officeDocument/2006/relationships" id="2147483648" r:id="R29742eee66c84a9c"/>
+    <p:sldMasterId xmlns:r="http://schemas.openxmlformats.org/officeDocument/2006/relationships" id="2147483648" r:id="R1e315cd06ba844eb"/>
   </p:sldMasterIdLst>
   <p:notesMasterIdLst>
-    <p:notesMasterId xmlns:r="http://schemas.openxmlformats.org/officeDocument/2006/relationships" r:id="Rc1f4c040156042eb"/>
+    <p:notesMasterId xmlns:r="http://schemas.openxmlformats.org/officeDocument/2006/relationships" r:id="R0afbe4c86cbf4074"/>
   </p:notesMasterIdLst>
   <p:sldIdLst>
-    <p:sldId xmlns:r="http://schemas.openxmlformats.org/officeDocument/2006/relationships" id="256" r:id="R6375731622524a0a"/>
-    <p:sldId xmlns:r="http://schemas.openxmlformats.org/officeDocument/2006/relationships" id="257" r:id="R74ad459c0d134679"/>
-    <p:sldId xmlns:r="http://schemas.openxmlformats.org/officeDocument/2006/relationships" id="258" r:id="R5af621cf6d214928"/>
-    <p:sldId xmlns:r="http://schemas.openxmlformats.org/officeDocument/2006/relationships" id="259" r:id="Ra0bdc3a2ad45439d"/>
-    <p:sldId xmlns:r="http://schemas.openxmlformats.org/officeDocument/2006/relationships" id="260" r:id="Rebba223ccffc4544"/>
-    <p:sldId xmlns:r="http://schemas.openxmlformats.org/officeDocument/2006/relationships" id="261" r:id="R00f842ad22b34c49"/>
-    <p:sldId xmlns:r="http://schemas.openxmlformats.org/officeDocument/2006/relationships" id="262" r:id="Rc3127831c96d497c"/>
-    <p:sldId xmlns:r="http://schemas.openxmlformats.org/officeDocument/2006/relationships" id="263" r:id="R1004f101cbe9467b"/>
-    <p:sldId xmlns:r="http://schemas.openxmlformats.org/officeDocument/2006/relationships" id="264" r:id="Rebaf0faff8cf468e"/>
-    <p:sldId xmlns:r="http://schemas.openxmlformats.org/officeDocument/2006/relationships" id="265" r:id="Rb57b3bba468e488c"/>
-    <p:sldId xmlns:r="http://schemas.openxmlformats.org/officeDocument/2006/relationships" id="266" r:id="Rb675c0e8bbf04d8f"/>
-    <p:sldId xmlns:r="http://schemas.openxmlformats.org/officeDocument/2006/relationships" id="267" r:id="Rcf2600ece28f49fe"/>
-    <p:sldId xmlns:r="http://schemas.openxmlformats.org/officeDocument/2006/relationships" id="268" r:id="R516a6957604143d4"/>
-    <p:sldId xmlns:r="http://schemas.openxmlformats.org/officeDocument/2006/relationships" id="269" r:id="R4de8d82fea1b4f61"/>
-    <p:sldId xmlns:r="http://schemas.openxmlformats.org/officeDocument/2006/relationships" id="270" r:id="Rf022d96d06f6444b"/>
-    <p:sldId xmlns:r="http://schemas.openxmlformats.org/officeDocument/2006/relationships" id="271" r:id="Rfe695ffd13f64f1e"/>
-    <p:sldId xmlns:r="http://schemas.openxmlformats.org/officeDocument/2006/relationships" id="272" r:id="R48dabc9f6e124e2c"/>
-    <p:sldId xmlns:r="http://schemas.openxmlformats.org/officeDocument/2006/relationships" id="273" r:id="R920d209dbd754835"/>
-    <p:sldId xmlns:r="http://schemas.openxmlformats.org/officeDocument/2006/relationships" id="274" r:id="R4b3319cadb874faf"/>
-    <p:sldId xmlns:r="http://schemas.openxmlformats.org/officeDocument/2006/relationships" id="275" r:id="R582d0890218148f6"/>
-    <p:sldId xmlns:r="http://schemas.openxmlformats.org/officeDocument/2006/relationships" id="276" r:id="Rfaab6fca26ac4d5f"/>
+    <p:sldId xmlns:r="http://schemas.openxmlformats.org/officeDocument/2006/relationships" id="256" r:id="R933e5d88e8fb435f"/>
+    <p:sldId xmlns:r="http://schemas.openxmlformats.org/officeDocument/2006/relationships" id="257" r:id="R1638a738e9334459"/>
+    <p:sldId xmlns:r="http://schemas.openxmlformats.org/officeDocument/2006/relationships" id="258" r:id="Raf7fc687a1e146b2"/>
+    <p:sldId xmlns:r="http://schemas.openxmlformats.org/officeDocument/2006/relationships" id="259" r:id="R8cf9f6db008c4144"/>
+    <p:sldId xmlns:r="http://schemas.openxmlformats.org/officeDocument/2006/relationships" id="260" r:id="R90c1ba41e1714d8e"/>
+    <p:sldId xmlns:r="http://schemas.openxmlformats.org/officeDocument/2006/relationships" id="261" r:id="Ra7e940312c9f4038"/>
+    <p:sldId xmlns:r="http://schemas.openxmlformats.org/officeDocument/2006/relationships" id="262" r:id="Rf5c2e094e2dc4741"/>
+    <p:sldId xmlns:r="http://schemas.openxmlformats.org/officeDocument/2006/relationships" id="263" r:id="Rd8ca97b2435445c5"/>
+    <p:sldId xmlns:r="http://schemas.openxmlformats.org/officeDocument/2006/relationships" id="264" r:id="R386e74b9eeb34a9e"/>
+    <p:sldId xmlns:r="http://schemas.openxmlformats.org/officeDocument/2006/relationships" id="265" r:id="R9221830f1458491b"/>
+    <p:sldId xmlns:r="http://schemas.openxmlformats.org/officeDocument/2006/relationships" id="266" r:id="R682fad4a6ee54968"/>
+    <p:sldId xmlns:r="http://schemas.openxmlformats.org/officeDocument/2006/relationships" id="267" r:id="R2c385c3dcb0a4c5d"/>
+    <p:sldId xmlns:r="http://schemas.openxmlformats.org/officeDocument/2006/relationships" id="268" r:id="R41f2dee3d27148d6"/>
+    <p:sldId xmlns:r="http://schemas.openxmlformats.org/officeDocument/2006/relationships" id="269" r:id="R2c8e70ce689d46d3"/>
+    <p:sldId xmlns:r="http://schemas.openxmlformats.org/officeDocument/2006/relationships" id="270" r:id="Rc7e965357fb048ad"/>
+    <p:sldId xmlns:r="http://schemas.openxmlformats.org/officeDocument/2006/relationships" id="271" r:id="Rb045b325f96d476e"/>
+    <p:sldId xmlns:r="http://schemas.openxmlformats.org/officeDocument/2006/relationships" id="272" r:id="Ra9ff34b4b4804a9a"/>
+    <p:sldId xmlns:r="http://schemas.openxmlformats.org/officeDocument/2006/relationships" id="273" r:id="Rca690f3c883c41ab"/>
+    <p:sldId xmlns:r="http://schemas.openxmlformats.org/officeDocument/2006/relationships" id="274" r:id="Rd6bc1588bf324ce9"/>
+    <p:sldId xmlns:r="http://schemas.openxmlformats.org/officeDocument/2006/relationships" id="275" r:id="Re638cb019b174616"/>
+    <p:sldId xmlns:r="http://schemas.openxmlformats.org/officeDocument/2006/relationships" id="276" r:id="R4bd48c9c5d654a74"/>
   </p:sldIdLst>
   <p:sldSz cx="12192000" cy="6858000"/>
   <p:notesSz cx="6858000" cy="9144000"/>
-  <p:defaultTextStyle>
-    <a:defPPr xmlns:a="http://schemas.openxmlformats.org/drawingml/2006/main">
-      <a:defRPr lang="en-US"/>
-    </a:defPPr>
-    <a:lvl1pPr xmlns:a="http://schemas.openxmlformats.org/drawingml/2006/main" marL="0" indent="0" algn="l" defTabSz="914400">
-      <a:defRPr sz="1800" kern="1200">
-        <a:solidFill>
-          <a:schemeClr val="tx1"/>
-        </a:solidFill>
-        <a:latin typeface="+mn-lt"/>
-        <a:ea typeface="+mn-ea"/>
-        <a:cs typeface="+mn-cs"/>
-      </a:defRPr>
-    </a:lvl1pPr>
-    <a:lvl2pPr xmlns:a="http://schemas.openxmlformats.org/drawingml/2006/main" marL="457200" indent="0" algn="l" defTabSz="914400">
-      <a:defRPr sz="1800" kern="1200">
-        <a:solidFill>
-          <a:schemeClr val="tx1"/>
-        </a:solidFill>
-        <a:latin typeface="+mn-lt"/>
-        <a:ea typeface="+mn-ea"/>
-        <a:cs typeface="+mn-cs"/>
-      </a:defRPr>
-    </a:lvl2pPr>
-    <a:lvl3pPr xmlns:a="http://schemas.openxmlformats.org/drawingml/2006/main" marL="914400" indent="0" algn="l" defTabSz="914400">
-      <a:defRPr sz="1800" kern="1200">
-        <a:solidFill>
-          <a:schemeClr val="tx1"/>
-        </a:solidFill>
-        <a:latin typeface="+mn-lt"/>
-        <a:ea typeface="+mn-ea"/>
-        <a:cs typeface="+mn-cs"/>
-      </a:defRPr>
-    </a:lvl3pPr>
-    <a:lvl4pPr xmlns:a="http://schemas.openxmlformats.org/drawingml/2006/main" marL="1371600" indent="0" algn="l" defTabSz="914400">
-      <a:defRPr sz="1800" kern="1200">
-        <a:solidFill>
-          <a:schemeClr val="tx1"/>
-        </a:solidFill>
-        <a:latin typeface="+mn-lt"/>
-        <a:ea typeface="+mn-ea"/>
-        <a:cs typeface="+mn-cs"/>
-      </a:defRPr>
-    </a:lvl4pPr>
-    <a:lvl5pPr xmlns:a="http://schemas.openxmlformats.org/drawingml/2006/main" marL="1828800" indent="0" algn="l" defTabSz="914400">
-      <a:defRPr sz="1800" kern="1200">
-        <a:solidFill>
-          <a:schemeClr val="tx1"/>
-        </a:solidFill>
-        <a:latin typeface="+mn-lt"/>
-        <a:ea typeface="+mn-ea"/>
-        <a:cs typeface="+mn-cs"/>
-      </a:defRPr>
-    </a:lvl5pPr>
-    <a:lvl6pPr xmlns:a="http://schemas.openxmlformats.org/drawingml/2006/main" marL="2286000" indent="0" algn="l" defTabSz="914400">
-      <a:defRPr sz="1800" kern="1200">
-        <a:solidFill>
-          <a:schemeClr val="tx1"/>
-        </a:solidFill>
-        <a:latin typeface="+mn-lt"/>
-        <a:ea typeface="+mn-ea"/>
-        <a:cs typeface="+mn-cs"/>
-      </a:defRPr>
-    </a:lvl6pPr>
-    <a:lvl7pPr xmlns:a="http://schemas.openxmlformats.org/drawingml/2006/main" marL="2743200" indent="0" algn="l" defTabSz="914400">
-      <a:defRPr sz="1800" kern="1200">
-        <a:solidFill>
-          <a:schemeClr val="tx1"/>
-        </a:solidFill>
-        <a:latin typeface="+mn-lt"/>
-        <a:ea typeface="+mn-ea"/>
-        <a:cs typeface="+mn-cs"/>
-      </a:defRPr>
-    </a:lvl7pPr>
-    <a:lvl8pPr xmlns:a="http://schemas.openxmlformats.org/drawingml/2006/main" marL="3200400" indent="0" algn="l" defTabSz="914400">
-      <a:defRPr sz="1800" kern="1200">
-        <a:solidFill>
-          <a:schemeClr val="tx1"/>
-        </a:solidFill>
-        <a:latin typeface="+mn-lt"/>
-        <a:ea typeface="+mn-ea"/>
-        <a:cs typeface="+mn-cs"/>
-      </a:defRPr>
-    </a:lvl8pPr>
-    <a:lvl9pPr xmlns:a="http://schemas.openxmlformats.org/drawingml/2006/main" marL="3657600" indent="0" algn="l" defTabSz="914400">
-      <a:defRPr sz="1800" kern="1200">
-        <a:solidFill>
-          <a:schemeClr val="tx1"/>
-        </a:solidFill>
-        <a:latin typeface="+mn-lt"/>
-        <a:ea typeface="+mn-ea"/>
-        <a:cs typeface="+mn-cs"/>
-      </a:defRPr>
-    </a:lvl9pPr>
-  </p:defaultTextStyle>
 </p:presentation>
 </file>
 
@@ -1453,7 +1358,26 @@
         <p:txBody>
           <a:bodyPr xmlns:a="http://schemas.openxmlformats.org/drawingml/2006/main"/>
           <a:lstStyle xmlns:a="http://schemas.openxmlformats.org/drawingml/2006/main"/>
-          <a:p xmlns:a="http://schemas.openxmlformats.org/drawingml/2006/main"/>
+          <a:p xmlns:a="http://schemas.openxmlformats.org/drawingml/2006/main">
+            <a:r>
+              <a:t>[Sources]</a:t>
+            </a:r>
+          </a:p>
+          <a:p xmlns:a="http://schemas.openxmlformats.org/drawingml/2006/main">
+            <a:r>
+              <a:t>- RPS mata kuliah Revisi AI 2026, Program Studi S2 Statistika Terapan FMIPA Universitas Padjadjaran.</a:t>
+            </a:r>
+          </a:p>
+          <a:p xmlns:a="http://schemas.openxmlformats.org/drawingml/2006/main">
+            <a:r>
+              <a:t>[/Sources]</a:t>
+            </a:r>
+          </a:p>
+          <a:p xmlns:a="http://schemas.openxmlformats.org/drawingml/2006/main">
+            <a:r>
+              <a:t>Penutup: CPL tetap. AI adalah akselerator ketercapaian CPMK/Sub-CPMK, bukan pengganti penalaran statistika. Tekankan kewajiban prompt log ringkas, sumber, kode/notebook reproducible, validasi, dan audit trail.</a:t>
+            </a:r>
+          </a:p>
         </p:txBody>
       </p:sp>
       <p:sp>
@@ -2010,8 +1934,8 @@
   </p:cSld>
   <p:clrMap bg1="lt1" tx1="dk1" bg2="lt2" tx2="dk2" accent1="accent1" accent2="accent2" accent3="accent3" accent4="accent4" accent5="accent5" accent6="accent6" hlink="hlink" folHlink="folHlink"/>
   <p:sldLayoutIdLst>
-    <p:sldLayoutId xmlns:r="http://schemas.openxmlformats.org/officeDocument/2006/relationships" id="2147483649" r:id="Rbda6ce49d4a84dca"/>
-    <p:sldLayoutId xmlns:r="http://schemas.openxmlformats.org/officeDocument/2006/relationships" id="2147483650" r:id="Ref8e2b32f8194837"/>
+    <p:sldLayoutId xmlns:r="http://schemas.openxmlformats.org/officeDocument/2006/relationships" id="2147483649" r:id="Ra5203873abd64cd7"/>
+    <p:sldLayoutId xmlns:r="http://schemas.openxmlformats.org/officeDocument/2006/relationships" id="2147483650" r:id="R3203e2dcf58e4b11"/>
   </p:sldLayoutIdLst>
   <p:hf sldNum="0" hdr="0" ftr="0" dt="0"/>
   <p:txStyles>
@@ -2577,7 +2501,7 @@
           <p:nvPr/>
         </p:nvPicPr>
         <p:blipFill>
-          <a:blip xmlns:r="http://schemas.openxmlformats.org/officeDocument/2006/relationships" xmlns:a="http://schemas.openxmlformats.org/drawingml/2006/main" r:embed="Rb8092d32a27b431f"/>
+          <a:blip xmlns:r="http://schemas.openxmlformats.org/officeDocument/2006/relationships" xmlns:a="http://schemas.openxmlformats.org/drawingml/2006/main" r:embed="R1e3e9356ea124d7c"/>
           <a:stretch xmlns:a="http://schemas.openxmlformats.org/drawingml/2006/main">
             <a:fillRect l="0" t="0" r="0" b="0"/>
           </a:stretch>
@@ -2723,7 +2647,7 @@
           <p:nvPr/>
         </p:nvPicPr>
         <p:blipFill>
-          <a:blip xmlns:r="http://schemas.openxmlformats.org/officeDocument/2006/relationships" xmlns:a="http://schemas.openxmlformats.org/drawingml/2006/main" r:embed="Rb6b88f5d6fdf4f2b"/>
+          <a:blip xmlns:r="http://schemas.openxmlformats.org/officeDocument/2006/relationships" xmlns:a="http://schemas.openxmlformats.org/drawingml/2006/main" r:embed="R2b4787b1ec22433e"/>
           <a:stretch xmlns:a="http://schemas.openxmlformats.org/drawingml/2006/main">
             <a:fillRect l="0" t="0" r="0" b="0"/>
           </a:stretch>
@@ -3345,7 +3269,7 @@
           <p:nvPr/>
         </p:nvPicPr>
         <p:blipFill>
-          <a:blip xmlns:r="http://schemas.openxmlformats.org/officeDocument/2006/relationships" xmlns:a="http://schemas.openxmlformats.org/drawingml/2006/main" r:embed="Rceab29b185804e43"/>
+          <a:blip xmlns:r="http://schemas.openxmlformats.org/officeDocument/2006/relationships" xmlns:a="http://schemas.openxmlformats.org/drawingml/2006/main" r:embed="R3ff9366cabf14d0b"/>
           <a:stretch xmlns:a="http://schemas.openxmlformats.org/drawingml/2006/main">
             <a:fillRect l="0" t="0" r="0" b="0"/>
           </a:stretch>
@@ -5495,7 +5419,7 @@
           <p:nvPr/>
         </p:nvPicPr>
         <p:blipFill>
-          <a:blip xmlns:r="http://schemas.openxmlformats.org/officeDocument/2006/relationships" xmlns:a="http://schemas.openxmlformats.org/drawingml/2006/main" r:embed="R24cb3c49f62c44b2"/>
+          <a:blip xmlns:r="http://schemas.openxmlformats.org/officeDocument/2006/relationships" xmlns:a="http://schemas.openxmlformats.org/drawingml/2006/main" r:embed="R0a9f6654f865430f"/>
           <a:stretch xmlns:a="http://schemas.openxmlformats.org/drawingml/2006/main">
             <a:fillRect l="0" t="0" r="0" b="0"/>
           </a:stretch>
@@ -5774,7 +5698,7 @@
           <p:nvPr/>
         </p:nvPicPr>
         <p:blipFill>
-          <a:blip xmlns:r="http://schemas.openxmlformats.org/officeDocument/2006/relationships" xmlns:a="http://schemas.openxmlformats.org/drawingml/2006/main" r:embed="Rfd0ec652c0434b6f"/>
+          <a:blip xmlns:r="http://schemas.openxmlformats.org/officeDocument/2006/relationships" xmlns:a="http://schemas.openxmlformats.org/drawingml/2006/main" r:embed="Rc133a33922d34cf9"/>
           <a:stretch xmlns:a="http://schemas.openxmlformats.org/drawingml/2006/main">
             <a:fillRect l="0" t="0" r="0" b="0"/>
           </a:stretch>
@@ -7308,7 +7232,7 @@
           <p:nvPr/>
         </p:nvPicPr>
         <p:blipFill>
-          <a:blip xmlns:r="http://schemas.openxmlformats.org/officeDocument/2006/relationships" xmlns:a="http://schemas.openxmlformats.org/drawingml/2006/main" r:embed="R4e927d85fefb4597"/>
+          <a:blip xmlns:r="http://schemas.openxmlformats.org/officeDocument/2006/relationships" xmlns:a="http://schemas.openxmlformats.org/drawingml/2006/main" r:embed="Rddd01cdbd900465a"/>
           <a:stretch xmlns:a="http://schemas.openxmlformats.org/drawingml/2006/main">
             <a:fillRect l="0" t="0" r="0" b="0"/>
           </a:stretch>
@@ -8477,7 +8401,7 @@
           <p:nvPr/>
         </p:nvPicPr>
         <p:blipFill>
-          <a:blip xmlns:r="http://schemas.openxmlformats.org/officeDocument/2006/relationships" xmlns:a="http://schemas.openxmlformats.org/drawingml/2006/main" r:embed="R8a76bec415e04c86"/>
+          <a:blip xmlns:r="http://schemas.openxmlformats.org/officeDocument/2006/relationships" xmlns:a="http://schemas.openxmlformats.org/drawingml/2006/main" r:embed="R4f266e45c91f4be1"/>
           <a:stretch xmlns:a="http://schemas.openxmlformats.org/drawingml/2006/main">
             <a:fillRect l="0" t="0" r="0" b="0"/>
           </a:stretch>
@@ -9704,7 +9628,7 @@
           <p:nvPr/>
         </p:nvPicPr>
         <p:blipFill>
-          <a:blip xmlns:r="http://schemas.openxmlformats.org/officeDocument/2006/relationships" xmlns:a="http://schemas.openxmlformats.org/drawingml/2006/main" r:embed="Redc84c2e4fc64880"/>
+          <a:blip xmlns:r="http://schemas.openxmlformats.org/officeDocument/2006/relationships" xmlns:a="http://schemas.openxmlformats.org/drawingml/2006/main" r:embed="Rc27e2986287b469d"/>
           <a:stretch xmlns:a="http://schemas.openxmlformats.org/drawingml/2006/main">
             <a:fillRect l="0" t="0" r="0" b="0"/>
           </a:stretch>
@@ -10909,7 +10833,7 @@
           <p:nvPr/>
         </p:nvPicPr>
         <p:blipFill>
-          <a:blip xmlns:r="http://schemas.openxmlformats.org/officeDocument/2006/relationships" xmlns:a="http://schemas.openxmlformats.org/drawingml/2006/main" r:embed="Re7662131c9eb467e"/>
+          <a:blip xmlns:r="http://schemas.openxmlformats.org/officeDocument/2006/relationships" xmlns:a="http://schemas.openxmlformats.org/drawingml/2006/main" r:embed="Re4f80810b3dc48b1"/>
           <a:stretch xmlns:a="http://schemas.openxmlformats.org/drawingml/2006/main">
             <a:fillRect l="0" t="0" r="0" b="0"/>
           </a:stretch>
@@ -11188,7 +11112,7 @@
           <p:nvPr/>
         </p:nvPicPr>
         <p:blipFill>
-          <a:blip xmlns:r="http://schemas.openxmlformats.org/officeDocument/2006/relationships" xmlns:a="http://schemas.openxmlformats.org/drawingml/2006/main" r:embed="R1c76e0d2e0294da4"/>
+          <a:blip xmlns:r="http://schemas.openxmlformats.org/officeDocument/2006/relationships" xmlns:a="http://schemas.openxmlformats.org/drawingml/2006/main" r:embed="R2b5ebbe21c574151"/>
           <a:stretch xmlns:a="http://schemas.openxmlformats.org/drawingml/2006/main">
             <a:fillRect l="0" t="0" r="0" b="0"/>
           </a:stretch>
@@ -12733,7 +12657,7 @@
           <p:nvPr/>
         </p:nvPicPr>
         <p:blipFill>
-          <a:blip xmlns:r="http://schemas.openxmlformats.org/officeDocument/2006/relationships" xmlns:a="http://schemas.openxmlformats.org/drawingml/2006/main" r:embed="R7113fd40a4bf448e"/>
+          <a:blip xmlns:r="http://schemas.openxmlformats.org/officeDocument/2006/relationships" xmlns:a="http://schemas.openxmlformats.org/drawingml/2006/main" r:embed="Ra6c9d5b61f5440ec"/>
           <a:stretch xmlns:a="http://schemas.openxmlformats.org/drawingml/2006/main">
             <a:fillRect l="0" t="0" r="0" b="0"/>
           </a:stretch>
@@ -14750,7 +14674,7 @@
           <p:nvPr/>
         </p:nvPicPr>
         <p:blipFill>
-          <a:blip xmlns:r="http://schemas.openxmlformats.org/officeDocument/2006/relationships" xmlns:a="http://schemas.openxmlformats.org/drawingml/2006/main" r:embed="R2add6cf8dcd444dc"/>
+          <a:blip xmlns:r="http://schemas.openxmlformats.org/officeDocument/2006/relationships" xmlns:a="http://schemas.openxmlformats.org/drawingml/2006/main" r:embed="R340d69fb4ef94fc9"/>
           <a:stretch xmlns:a="http://schemas.openxmlformats.org/drawingml/2006/main">
             <a:fillRect l="0" t="0" r="0" b="0"/>
           </a:stretch>
@@ -15977,7 +15901,7 @@
           <p:nvPr/>
         </p:nvPicPr>
         <p:blipFill>
-          <a:blip xmlns:r="http://schemas.openxmlformats.org/officeDocument/2006/relationships" xmlns:a="http://schemas.openxmlformats.org/drawingml/2006/main" r:embed="Ra2eba7d4eb8c4879"/>
+          <a:blip xmlns:r="http://schemas.openxmlformats.org/officeDocument/2006/relationships" xmlns:a="http://schemas.openxmlformats.org/drawingml/2006/main" r:embed="R2f95882fc08e41e0"/>
           <a:stretch xmlns:a="http://schemas.openxmlformats.org/drawingml/2006/main">
             <a:fillRect l="0" t="0" r="0" b="0"/>
           </a:stretch>
@@ -17118,7 +17042,7 @@
           <p:nvPr/>
         </p:nvPicPr>
         <p:blipFill>
-          <a:blip xmlns:r="http://schemas.openxmlformats.org/officeDocument/2006/relationships" xmlns:a="http://schemas.openxmlformats.org/drawingml/2006/main" r:embed="Ra7d00d5cd010402d"/>
+          <a:blip xmlns:r="http://schemas.openxmlformats.org/officeDocument/2006/relationships" xmlns:a="http://schemas.openxmlformats.org/drawingml/2006/main" r:embed="Ra00868a7031545ce"/>
           <a:stretch xmlns:a="http://schemas.openxmlformats.org/drawingml/2006/main">
             <a:fillRect l="0" t="0" r="0" b="0"/>
           </a:stretch>
@@ -18583,7 +18507,7 @@
           <p:nvPr/>
         </p:nvPicPr>
         <p:blipFill>
-          <a:blip xmlns:r="http://schemas.openxmlformats.org/officeDocument/2006/relationships" xmlns:a="http://schemas.openxmlformats.org/drawingml/2006/main" r:embed="R264b41c665ce4b18"/>
+          <a:blip xmlns:r="http://schemas.openxmlformats.org/officeDocument/2006/relationships" xmlns:a="http://schemas.openxmlformats.org/drawingml/2006/main" r:embed="R5e834efd13a04565"/>
           <a:stretch xmlns:a="http://schemas.openxmlformats.org/drawingml/2006/main">
             <a:fillRect l="0" t="0" r="0" b="0"/>
           </a:stretch>
@@ -18729,7 +18653,7 @@
           <p:nvPr/>
         </p:nvPicPr>
         <p:blipFill>
-          <a:blip xmlns:r="http://schemas.openxmlformats.org/officeDocument/2006/relationships" xmlns:a="http://schemas.openxmlformats.org/drawingml/2006/main" r:embed="Rcaff10e2ac434cdf"/>
+          <a:blip xmlns:r="http://schemas.openxmlformats.org/officeDocument/2006/relationships" xmlns:a="http://schemas.openxmlformats.org/drawingml/2006/main" r:embed="Rf9c6fd68771747d9"/>
           <a:stretch xmlns:a="http://schemas.openxmlformats.org/drawingml/2006/main">
             <a:fillRect l="0" t="0" r="0" b="0"/>
           </a:stretch>
@@ -18833,7 +18757,7 @@
                 <a:ea typeface="Aptos Display"/>
                 <a:cs typeface="Aptos Display"/>
               </a:rPr>
-              <a:t>Dari data menuju</a:t>
+              <a:t>AI mempercepat proses,</a:t>
             </a:r>
           </a:p>
           <a:p xmlns:a="http://schemas.openxmlformats.org/drawingml/2006/main">
@@ -18849,7 +18773,7 @@
                 <a:ea typeface="Aptos Display"/>
                 <a:cs typeface="Aptos Display"/>
               </a:rPr>
-              <a:t>keputusan yang dapat diuji</a:t>
+              <a:t>penalaran tetap memimpin</a:t>
             </a:r>
           </a:p>
         </p:txBody>
@@ -18916,7 +18840,7 @@
         </p:spPr>
         <p:txBody>
           <a:bodyPr xmlns:a="http://schemas.openxmlformats.org/drawingml/2006/main" wrap="square" lIns="635" tIns="635" rIns="635" bIns="635" anchor="t">
-            <a:normAutofit fontScale="100000"/>
+            <a:normAutofit fontScale="93620"/>
           </a:bodyPr>
           <a:lstStyle xmlns:a="http://schemas.openxmlformats.org/drawingml/2006/main"/>
           <a:p xmlns:a="http://schemas.openxmlformats.org/drawingml/2006/main">
@@ -18932,7 +18856,7 @@
                 <a:ea typeface="Aptos"/>
                 <a:cs typeface="Aptos"/>
               </a:rPr>
-              <a:t>Analisis Multivariat Lanjut menghubungkan teori, data, metode, validasi, dan komunikasi untuk menghasilkan keputusan yang sahih, dapat direplikasi, dan bertanggung…</a:t>
+              <a:t>Analisis Multivariat Tingkat Lanjut memadukan teori, data, komputasi, validasi, dan komunikasi. AI mempercepat eksplorasi dan pemeriksaan awal; mahasiswa tetap memverifikasi asumsi, kode, hasil numerik, ketidakpastian, sumber, dan dampak sebelum mengambil keputusan.</a:t>
             </a:r>
           </a:p>
         </p:txBody>
@@ -19102,7 +19026,7 @@
           <p:nvPr/>
         </p:nvPicPr>
         <p:blipFill>
-          <a:blip xmlns:r="http://schemas.openxmlformats.org/officeDocument/2006/relationships" xmlns:a="http://schemas.openxmlformats.org/drawingml/2006/main" r:embed="R5489ea80661d4f3c"/>
+          <a:blip xmlns:r="http://schemas.openxmlformats.org/officeDocument/2006/relationships" xmlns:a="http://schemas.openxmlformats.org/drawingml/2006/main" r:embed="Re130a146f609493c"/>
           <a:stretch xmlns:a="http://schemas.openxmlformats.org/drawingml/2006/main">
             <a:fillRect l="0" t="0" r="0" b="0"/>
           </a:stretch>
@@ -20233,7 +20157,7 @@
           <p:nvPr/>
         </p:nvPicPr>
         <p:blipFill>
-          <a:blip xmlns:r="http://schemas.openxmlformats.org/officeDocument/2006/relationships" xmlns:a="http://schemas.openxmlformats.org/drawingml/2006/main" r:embed="R2dcf13e6cc69450e"/>
+          <a:blip xmlns:r="http://schemas.openxmlformats.org/officeDocument/2006/relationships" xmlns:a="http://schemas.openxmlformats.org/drawingml/2006/main" r:embed="R13dd09bd953c4e08"/>
           <a:stretch xmlns:a="http://schemas.openxmlformats.org/drawingml/2006/main">
             <a:fillRect l="0" t="0" r="0" b="0"/>
           </a:stretch>
@@ -22337,7 +22261,7 @@
           <p:nvPr/>
         </p:nvPicPr>
         <p:blipFill>
-          <a:blip xmlns:r="http://schemas.openxmlformats.org/officeDocument/2006/relationships" xmlns:a="http://schemas.openxmlformats.org/drawingml/2006/main" r:embed="Reaccbb3c243f40cb"/>
+          <a:blip xmlns:r="http://schemas.openxmlformats.org/officeDocument/2006/relationships" xmlns:a="http://schemas.openxmlformats.org/drawingml/2006/main" r:embed="Rdcf5fdbf6abd4934"/>
           <a:stretch xmlns:a="http://schemas.openxmlformats.org/drawingml/2006/main">
             <a:fillRect l="0" t="0" r="0" b="0"/>
           </a:stretch>
@@ -23619,7 +23543,7 @@
           <p:nvPr/>
         </p:nvPicPr>
         <p:blipFill>
-          <a:blip xmlns:r="http://schemas.openxmlformats.org/officeDocument/2006/relationships" xmlns:a="http://schemas.openxmlformats.org/drawingml/2006/main" r:embed="R77b32db000504488"/>
+          <a:blip xmlns:r="http://schemas.openxmlformats.org/officeDocument/2006/relationships" xmlns:a="http://schemas.openxmlformats.org/drawingml/2006/main" r:embed="R7e0a481cbc9f48be"/>
           <a:stretch xmlns:a="http://schemas.openxmlformats.org/drawingml/2006/main">
             <a:fillRect l="0" t="0" r="0" b="0"/>
           </a:stretch>
@@ -23898,7 +23822,7 @@
           <p:nvPr/>
         </p:nvPicPr>
         <p:blipFill>
-          <a:blip xmlns:r="http://schemas.openxmlformats.org/officeDocument/2006/relationships" xmlns:a="http://schemas.openxmlformats.org/drawingml/2006/main" r:embed="R3c95e5006d714189"/>
+          <a:blip xmlns:r="http://schemas.openxmlformats.org/officeDocument/2006/relationships" xmlns:a="http://schemas.openxmlformats.org/drawingml/2006/main" r:embed="R248f2a250d384fbc"/>
           <a:stretch xmlns:a="http://schemas.openxmlformats.org/drawingml/2006/main">
             <a:fillRect l="0" t="0" r="0" b="0"/>
           </a:stretch>
@@ -25978,7 +25902,7 @@
           <p:nvPr/>
         </p:nvPicPr>
         <p:blipFill>
-          <a:blip xmlns:r="http://schemas.openxmlformats.org/officeDocument/2006/relationships" xmlns:a="http://schemas.openxmlformats.org/drawingml/2006/main" r:embed="R5009ef1a446b4cb8"/>
+          <a:blip xmlns:r="http://schemas.openxmlformats.org/officeDocument/2006/relationships" xmlns:a="http://schemas.openxmlformats.org/drawingml/2006/main" r:embed="Rd6493d4e726b4128"/>
           <a:stretch xmlns:a="http://schemas.openxmlformats.org/drawingml/2006/main">
             <a:fillRect l="0" t="0" r="0" b="0"/>
           </a:stretch>
@@ -27391,7 +27315,7 @@
           <p:nvPr/>
         </p:nvPicPr>
         <p:blipFill>
-          <a:blip xmlns:r="http://schemas.openxmlformats.org/officeDocument/2006/relationships" xmlns:a="http://schemas.openxmlformats.org/drawingml/2006/main" r:embed="Rc14bcf3a381049f9"/>
+          <a:blip xmlns:r="http://schemas.openxmlformats.org/officeDocument/2006/relationships" xmlns:a="http://schemas.openxmlformats.org/drawingml/2006/main" r:embed="R26c9f6317ded4384"/>
           <a:stretch xmlns:a="http://schemas.openxmlformats.org/drawingml/2006/main">
             <a:fillRect l="0" t="0" r="0" b="0"/>
           </a:stretch>
